--- a/dist/초2/체육·보건·안전/경계와안전/초2_체육·보건·안전_경계와안전_01_싫어요말하기와안전.pptx
+++ b/dist/초2/체육·보건·안전/경계와안전/초2_체육·보건·안전_경계와안전_01_싫어요말하기와안전.pptx
@@ -120,13 +120,13 @@
   <p:extLst>
     <p:ext uri="{521415D9-36F7-43E2-AB2F-B90AF26B5E84}">
       <p14:sectionLst xmlns:p14="http://schemas.microsoft.com/office/powerpoint/2010/main">
-        <p14:section name="도입" id="{deae6628-eb47-1a7e-eecb-c333b9042d3a}">
+        <p14:section name="도입" id="{c22237cf-643b-87cb-4f0d-0d2cffd82195}">
           <p14:sldIdLst>
             <p14:sldId id="256"/>
             <p14:sldId id="257"/>
           </p14:sldIdLst>
         </p14:section>
-        <p14:section name="개념" id="{33cf34df-3f2d-48e9-29a9-837ff5699b08}">
+        <p14:section name="개념" id="{46cff4ac-430a-af48-1411-758a98fd682d}">
           <p14:sldIdLst>
             <p14:sldId id="258"/>
             <p14:sldId id="259"/>
@@ -135,37 +135,37 @@
             <p14:sldId id="264"/>
           </p14:sldIdLst>
         </p14:section>
-        <p14:section name="연습" id="{1b491302-788d-efe6-010e-3d4172a1ddaa}">
+        <p14:section name="연습" id="{1127925d-30c7-48ad-15ad-1ec2c8682d29}">
           <p14:sldIdLst>
             <p14:sldId id="260"/>
             <p14:sldId id="262"/>
             <p14:sldId id="265"/>
           </p14:sldIdLst>
         </p14:section>
-        <p14:section name="개념" id="{6dbd7423-2133-846d-57e6-5db2b4b1dcb1}">
+        <p14:section name="개념" id="{c2f9bc1f-4703-772d-77f3-6ad49f038b18}">
           <p14:sldIdLst/>
         </p14:section>
-        <p14:section name="연습" id="{99d5eac0-f426-dd8f-a41b-87ccb2fa359a}">
+        <p14:section name="연습" id="{6012912d-3915-5428-34f1-873a91cfcd56}">
           <p14:sldIdLst/>
         </p14:section>
-        <p14:section name="개념" id="{a5711c8c-fc50-51e7-51d8-ea700760499b}">
+        <p14:section name="개념" id="{00c5263f-cbd8-ff56-77eb-ab6d8a802c17}">
           <p14:sldIdLst/>
         </p14:section>
-        <p14:section name="연습" id="{334f245c-cbe3-bf1e-0724-6cbb4881934c}">
+        <p14:section name="연습" id="{fbe017c4-9cdc-866a-da0b-6cb33d93427f}">
           <p14:sldIdLst/>
         </p14:section>
-        <p14:section name="확인" id="{e4e6d1d4-335a-ab58-b7ee-536900efe54d}">
+        <p14:section name="확인" id="{a033d9d7-f861-8f5c-afbf-7c471dee4735}">
           <p14:sldIdLst>
             <p14:sldId id="266"/>
             <p14:sldId id="267"/>
           </p14:sldIdLst>
         </p14:section>
-        <p14:section name="정리" id="{54d5b0d4-216c-c6a6-9797-3e37bacfa4c2}">
+        <p14:section name="정리" id="{c10445ed-0450-896d-cf11-18eaa1083cdc}">
           <p14:sldIdLst>
             <p14:sldId id="268"/>
           </p14:sldIdLst>
         </p14:section>
-        <p14:section name="보충" id="{ab8c44c0-8f5e-729d-f9ea-83f93ff57b8d}">
+        <p14:section name="보충" id="{6d502640-6e88-1386-d24c-6231a173c527}">
           <p14:sldIdLst>
             <p14:sldId id="269"/>
           </p14:sldIdLst>
